--- a/templates/IQVIA-test-preview.pptx
+++ b/templates/IQVIA-test-preview.pptx
@@ -34458,28 +34458,7 @@
       <p:grpSpPr/>
       <p:sp>
         <p:nvSpPr>
-          <p:cNvPr id="2" name="Text Placeholder 1"/>
-          <p:cNvSpPr>
-            <a:spLocks noGrp="1"/>
-          </p:cNvSpPr>
-          <p:nvPr>
-            <p:ph type="body" idx="16" sz="quarter"/>
-          </p:nvPr>
-        </p:nvSpPr>
-        <p:spPr/>
-        <p:txBody>
-          <a:bodyPr/>
-          <a:lstStyle/>
-          <a:p>
-            <a:r>
-              <a:t>EYEBROW</a:t>
-            </a:r>
-          </a:p>
-        </p:txBody>
-      </p:sp>
-      <p:sp>
-        <p:nvSpPr>
-          <p:cNvPr id="3" name="Title 2"/>
+          <p:cNvPr id="2" name="Title 1"/>
           <p:cNvSpPr>
             <a:spLocks noGrp="1"/>
           </p:cNvSpPr>

--- a/templates/IQVIA-test-preview.pptx
+++ b/templates/IQVIA-test-preview.pptx
@@ -34477,6 +34477,27 @@
           </a:p>
         </p:txBody>
       </p:sp>
+      <p:sp>
+        <p:nvSpPr>
+          <p:cNvPr id="3" name="Subtitle 2"/>
+          <p:cNvSpPr>
+            <a:spLocks noGrp="1"/>
+          </p:cNvSpPr>
+          <p:nvPr>
+            <p:ph type="subTitle" idx="1"/>
+          </p:nvPr>
+        </p:nvSpPr>
+        <p:spPr/>
+        <p:txBody>
+          <a:bodyPr/>
+          <a:lstStyle/>
+          <a:p>
+            <a:r>
+              <a:t>EYEBROW</a:t>
+            </a:r>
+          </a:p>
+        </p:txBody>
+      </p:sp>
     </p:spTree>
   </p:cSld>
   <p:clrMapOvr>
